--- a/PPTs/Ch6_ARM_Control_Flow_Exercises_ANS.pptx
+++ b/PPTs/Ch6_ARM_Control_Flow_Exercises_ANS.pptx
@@ -7786,7 +7786,7 @@
           <a:p>
             <a:r>
               <a:rPr lang="en-US" dirty="0"/>
-              <a:t>Fall 2025</a:t>
+              <a:t>Fall 2026</a:t>
             </a:r>
           </a:p>
         </p:txBody>
@@ -7863,7 +7863,7 @@
                   <a:srgbClr val="C00000"/>
                 </a:solidFill>
               </a:rPr>
-              <a:t>Flow Control in Assembly</a:t>
+              <a:t>Control Flow in Assembly</a:t>
             </a:r>
           </a:p>
           <a:p>
@@ -8519,7 +8519,7 @@
           <a:p>
             <a:r>
               <a:rPr lang="en-US" dirty="0"/>
-              <a:t>This version removes r1, and uses post-index addressing to increment the array index r0, adding 4 to r0 in every loop iteration</a:t>
+              <a:t>This version removes r1, and uses post-index addressing to increment the array pointer r0, adding 4 to r0 in every loop iteration</a:t>
             </a:r>
           </a:p>
         </p:txBody>
@@ -9984,7 +9984,7 @@
                           <a:ea typeface="宋体"/>
                           <a:cs typeface="+mn-cs"/>
                         </a:rPr>
-                        <a:t>   BEQ end         ; If </a:t>
+                        <a:t>   BEQ done         ; If </a:t>
                       </a:r>
                       <a:r>
                         <a:rPr kumimoji="0" lang="en-US" sz="1600" b="0" kern="1200" dirty="0" err="1">
@@ -10008,7 +10008,7 @@
                           <a:ea typeface="宋体"/>
                           <a:cs typeface="+mn-cs"/>
                         </a:rPr>
-                        <a:t> == 10, branch to end</a:t>
+                        <a:t> == 10, branch to done</a:t>
                       </a:r>
                       <a:br>
                         <a:rPr kumimoji="0" lang="en-US" sz="1600" b="0" kern="1200" dirty="0">
@@ -11025,7 +11025,7 @@
                           <a:ea typeface="宋体"/>
                           <a:cs typeface="+mn-cs"/>
                         </a:rPr>
-                        <a:t>     ; Compare x0 with 10 while x0 &lt;=10</a:t>
+                        <a:t>     ; Compare r0 with 11 (exit when cnt reaches 11)</a:t>
                       </a:r>
                       <a:br>
                         <a:rPr kumimoji="0" lang="en-US" sz="1600" b="0" kern="1200" dirty="0">
@@ -11072,7 +11072,7 @@
                           <a:ea typeface="宋体"/>
                           <a:cs typeface="+mn-cs"/>
                         </a:rPr>
-                        <a:t> == 10, branch to end</a:t>
+                        <a:t> == 11, branch to done</a:t>
                       </a:r>
                       <a:br>
                         <a:rPr kumimoji="0" lang="en-US" sz="1600" b="0" kern="1200" dirty="0">
@@ -11227,7 +11227,7 @@
           <a:p>
             <a:r>
               <a:rPr lang="en-US" altLang="zh-CN" sz="1400" dirty="0"/>
-              <a:t>The loop checks CMP r0, #10 and exits immediately if they are equal (BEQ end). Because it exits </a:t>
+              <a:t>The loop checks CMP r0, #10 and exits immediately if they are equal (BEQ done). Because it exits </a:t>
             </a:r>
             <a:r>
               <a:rPr lang="en-US" altLang="zh-CN" sz="1400" i="1" dirty="0"/>
@@ -11249,13 +11249,13 @@
           <a:p>
             <a:r>
               <a:rPr lang="en-US" altLang="zh-CN" sz="1400" dirty="0"/>
-              <a:t>Option 1: Compare against 11: CMP r0, #11 and branch on equal BEQ end.</a:t>
+              <a:t>Option 1: Compare against 11: CMP r0, #11 and branch on equal BEQ done.</a:t>
             </a:r>
           </a:p>
           <a:p>
             <a:r>
               <a:rPr lang="en-US" altLang="zh-CN" sz="1400" dirty="0"/>
-              <a:t>Option 2: Keep the comparison with 10 but change the branch logic to branch out if greater than 10: BGT end.</a:t>
+              <a:t>Option 2: Keep the comparison with 10 but change the branch logic to branch out if greater than 10: BGT done.</a:t>
             </a:r>
             <a:endParaRPr lang="zh-CN" altLang="en-US" sz="1400" dirty="0"/>
           </a:p>
@@ -11602,7 +11602,7 @@
                           <a:ea typeface="宋体"/>
                           <a:cs typeface="+mn-cs"/>
                         </a:rPr>
-                        <a:t>   CMP r0, #10     ; Compare x0 with 10 while x0 &lt;=10</a:t>
+                        <a:t>   CMP r0, #10     ; Compare r0 with 10 while r0 &lt;= 10</a:t>
                       </a:r>
                       <a:br>
                         <a:rPr kumimoji="0" lang="en-US" sz="1600" b="0" kern="1200" dirty="0">
@@ -11673,7 +11673,7 @@
                           <a:ea typeface="宋体"/>
                           <a:cs typeface="+mn-cs"/>
                         </a:rPr>
-                        <a:t> &gt; 10, branch to end</a:t>
+                        <a:t> &gt; 10, branch to done</a:t>
                       </a:r>
                       <a:br>
                         <a:rPr kumimoji="0" lang="en-US" sz="1600" b="0" kern="1200" dirty="0">
@@ -12313,7 +12313,7 @@
                           <a:ea typeface="宋体"/>
                           <a:cs typeface="+mn-cs"/>
                         </a:rPr>
-                        <a:t>     ; Compare x0 with 10 while x0 &lt;=10</a:t>
+                        <a:t>     ; Compare r0 with 11 (exit when cnt reaches 11)</a:t>
                       </a:r>
                       <a:br>
                         <a:rPr kumimoji="0" lang="en-US" sz="1600" b="0" kern="1200" dirty="0">
@@ -12360,7 +12360,7 @@
                           <a:ea typeface="宋体"/>
                           <a:cs typeface="+mn-cs"/>
                         </a:rPr>
-                        <a:t> == 10, branch to end</a:t>
+                        <a:t> == 11, branch to done</a:t>
                       </a:r>
                       <a:br>
                         <a:rPr kumimoji="0" lang="en-US" sz="1600" b="0" kern="1200" dirty="0">
@@ -12639,7 +12639,7 @@
                           <a:latin typeface="Consolas" panose="020B0609020204030204" pitchFamily="49" charset="0"/>
                           <a:cs typeface="Consolas" panose="020B0609020204030204" pitchFamily="49" charset="0"/>
                         </a:rPr>
-                        <a:t>Programu</a:t>
+                        <a:t>Program</a:t>
                       </a:r>
                       <a:endParaRPr lang="en-US" sz="1600" dirty="0">
                         <a:solidFill>
@@ -12871,7 +12871,7 @@
                           <a:ea typeface="宋体"/>
                           <a:cs typeface="+mn-cs"/>
                         </a:rPr>
-                        <a:t>   CMP r0, #10     ; Compare x0 with 10 while x0 &lt;=10</a:t>
+                        <a:t>   CMP r0, #10     ; Compare r0 with 10 while r0 &lt;= 10</a:t>
                       </a:r>
                       <a:br>
                         <a:rPr kumimoji="0" lang="en-US" sz="1600" b="0" kern="1200" dirty="0">
@@ -12942,7 +12942,7 @@
                           <a:ea typeface="宋体"/>
                           <a:cs typeface="+mn-cs"/>
                         </a:rPr>
-                        <a:t> &gt; 10, branch to end</a:t>
+                        <a:t> &gt; 10, branch to done</a:t>
                       </a:r>
                       <a:br>
                         <a:rPr kumimoji="0" lang="en-US" sz="1600" b="0" kern="1200" dirty="0">
@@ -13479,7 +13479,7 @@
                           <a:latin typeface="Consolas" panose="020B0609020204030204" pitchFamily="49" charset="0"/>
                           <a:cs typeface="Consolas" panose="020B0609020204030204" pitchFamily="49" charset="0"/>
                         </a:rPr>
-                        <a:t>--;ss</a:t>
+                        <a:t>-- (no S suffix: flags not updated)</a:t>
                       </a:r>
                     </a:p>
                     <a:p>
@@ -14016,7 +14016,7 @@
           <a:p>
             <a:r>
               <a:rPr lang="en-US" sz="1600" dirty="0"/>
-              <a:t>Error:  loop will run infinitely because the subtraction does not update the CPU condition flags.</a:t>
+              <a:t>Error:  BNE tests stale condition flags (typically an infinite loop) because SUB without the S suffix does not update the CPU condition flags.</a:t>
             </a:r>
           </a:p>
           <a:p>
@@ -20532,7 +20532,7 @@
                           <a:latin typeface="Consolas" panose="020B0609020204030204" pitchFamily="49" charset="0"/>
                           <a:cs typeface="Consolas" panose="020B0609020204030204" pitchFamily="49" charset="0"/>
                         </a:rPr>
-                        <a:t>MOV R0, 0x60000000  ; base address where array resides</a:t>
+                        <a:t>MOV R0, #0x60000000  ; base address where array resides</a:t>
                       </a:r>
                     </a:p>
                     <a:p>
@@ -21007,7 +21007,7 @@
                           <a:latin typeface="Consolas" panose="020B0609020204030204" pitchFamily="49" charset="0"/>
                           <a:cs typeface="Consolas" panose="020B0609020204030204" pitchFamily="49" charset="0"/>
                         </a:rPr>
-                        <a:t>MOV R0, 0x60000000</a:t>
+                        <a:t>MOV R0, #0x60000000</a:t>
                       </a:r>
                     </a:p>
                     <a:p>
@@ -24781,6 +24781,24 @@
                           <a:cs typeface="Consolas" panose="020B0609020204030204" pitchFamily="49" charset="0"/>
                         </a:rPr>
                         <a:t>CMP r0, r1   </a:t>
+                      </a:r>
+                    </a:p>
+                    <a:p>
+                      <a:pPr marL="0" marR="0" algn="just">
+                        <a:spcBef>
+                          <a:spcPts val="0"/>
+                        </a:spcBef>
+                        <a:spcAft>
+                          <a:spcPts val="0"/>
+                        </a:spcAft>
+                      </a:pPr>
+                      <a:r>
+                        <a:rPr lang="pt-BR" sz="1600" i="0" dirty="0">
+                          <a:effectLst/>
+                          <a:latin typeface="Consolas" panose="020B0609020204030204" pitchFamily="49" charset="0"/>
+                          <a:cs typeface="Consolas" panose="020B0609020204030204" pitchFamily="49" charset="0"/>
+                        </a:rPr>
+                        <a:t>IT NE</a:t>
                       </a:r>
                     </a:p>
                     <a:p>
@@ -28837,6 +28855,10 @@
               <a:rPr lang="en-US" dirty="0"/>
               <a:t>ANS:</a:t>
             </a:r>
+            <a:r>
+              <a:rPr lang="en-US" dirty="0"/>
+              <a:t xml:space="preserve"> (on Cortex-M each conditional instruction is preceded by IT cond)</a:t>
+            </a:r>
           </a:p>
           <a:p>
             <a:pPr lvl="1"/>
@@ -28849,6 +28871,13 @@
             <a:pPr lvl="1"/>
             <a:r>
               <a:rPr lang="en-US" dirty="0"/>
+              <a:t>IT PL</a:t>
+            </a:r>
+          </a:p>
+          <a:p>
+            <a:pPr lvl="1"/>
+            <a:r>
+              <a:rPr lang="en-US" dirty="0"/>
               <a:t>ADDPL r7, r3, r6</a:t>
             </a:r>
           </a:p>
@@ -28863,6 +28892,13 @@
             <a:pPr lvl="1"/>
             <a:r>
               <a:rPr lang="en-US" dirty="0"/>
+              <a:t>IT HI</a:t>
+            </a:r>
+          </a:p>
+          <a:p>
+            <a:pPr lvl="1"/>
+            <a:r>
+              <a:rPr lang="en-US" dirty="0"/>
               <a:t>MULHI r3, r7, r12</a:t>
             </a:r>
           </a:p>
@@ -28871,6 +28907,13 @@
             <a:r>
               <a:rPr lang="en-US" dirty="0"/>
               <a:t>; NE, Not equal (Z=0). Compare r6 and r8 only if Z is clear</a:t>
+            </a:r>
+          </a:p>
+          <a:p>
+            <a:pPr lvl="1"/>
+            <a:r>
+              <a:rPr lang="en-US" dirty="0"/>
+              <a:t>IT NE</a:t>
             </a:r>
           </a:p>
           <a:p>
@@ -29023,7 +29066,7 @@
           <p:nvPr/>
         </p:nvGraphicFramePr>
         <p:xfrm>
-          <a:off x="751114" y="2296886"/>
+          <a:off x="751114" y="2295144"/>
           <a:ext cx="7391400" cy="1219200"/>
         </p:xfrm>
         <a:graphic>
@@ -29063,7 +29106,7 @@
                         </a:spcAft>
                       </a:pPr>
                       <a:r>
-                        <a:rPr lang="en-US" sz="1600" dirty="0">
+                        <a:rPr lang="en-US" sz="1400" dirty="0">
                           <a:solidFill>
                             <a:schemeClr val="bg1"/>
                           </a:solidFill>
@@ -29073,7 +29116,7 @@
                         </a:rPr>
                         <a:t>Assembly Program</a:t>
                       </a:r>
-                      <a:endParaRPr lang="en-US" sz="1600" dirty="0">
+                      <a:endParaRPr lang="en-US" sz="1400" dirty="0">
                         <a:solidFill>
                           <a:schemeClr val="bg1"/>
                         </a:solidFill>
@@ -29104,7 +29147,7 @@
                         </a:spcAft>
                       </a:pPr>
                       <a:r>
-                        <a:rPr lang="en-US" sz="1600" dirty="0">
+                        <a:rPr lang="en-US" sz="1400" dirty="0">
                           <a:solidFill>
                             <a:schemeClr val="bg1"/>
                           </a:solidFill>
@@ -29114,7 +29157,7 @@
                         </a:rPr>
                         <a:t>C Program</a:t>
                       </a:r>
-                      <a:endParaRPr lang="en-US" sz="1600" dirty="0">
+                      <a:endParaRPr lang="en-US" sz="1400" dirty="0">
                         <a:solidFill>
                           <a:schemeClr val="bg1"/>
                         </a:solidFill>
@@ -29144,7 +29187,7 @@
                     <a:lstStyle/>
                     <a:p>
                       <a:r>
-                        <a:rPr kumimoji="0" lang="en-US" sz="1600" b="1" i="0" kern="1200" dirty="0">
+                        <a:rPr kumimoji="0" lang="en-US" sz="1400" b="1" i="0" kern="1200" dirty="0">
                           <a:solidFill>
                             <a:schemeClr val="tx1"/>
                           </a:solidFill>
@@ -29156,7 +29199,7 @@
                         <a:t>CMP</a:t>
                       </a:r>
                       <a:r>
-                        <a:rPr kumimoji="0" lang="en-US" sz="1600" b="0" i="0" kern="1200" dirty="0">
+                        <a:rPr kumimoji="0" lang="en-US" sz="1400" b="0" i="0" kern="1200" dirty="0">
                           <a:solidFill>
                             <a:schemeClr val="tx1"/>
                           </a:solidFill>
@@ -29170,7 +29213,7 @@
                     </a:p>
                     <a:p>
                       <a:r>
-                        <a:rPr kumimoji="0" lang="en-US" sz="1600" b="1" i="0" kern="1200" dirty="0">
+                        <a:rPr kumimoji="0" lang="en-US" sz="1400" b="1" i="0" kern="1200" dirty="0">
                           <a:solidFill>
                             <a:schemeClr val="tx1"/>
                           </a:solidFill>
@@ -29179,10 +29222,12 @@
                           <a:ea typeface="+mn-ea"/>
                           <a:cs typeface="+mn-cs"/>
                         </a:rPr>
-                        <a:t>MOVEQ</a:t>
-                      </a:r>
-                      <a:r>
-                        <a:rPr kumimoji="0" lang="en-US" sz="1600" b="0" i="0" kern="1200" dirty="0">
+                        <a:t>ITT EQ</a:t>
+                      </a:r>
+                    </a:p>
+                    <a:p>
+                      <a:r>
+                        <a:rPr kumimoji="0" lang="en-US" sz="1400" b="1" i="0" kern="1200" dirty="0">
                           <a:solidFill>
                             <a:schemeClr val="tx1"/>
                           </a:solidFill>
@@ -29191,12 +29236,10 @@
                           <a:ea typeface="+mn-ea"/>
                           <a:cs typeface="+mn-cs"/>
                         </a:rPr>
-                        <a:t> r0, #10  </a:t>
-                      </a:r>
-                    </a:p>
-                    <a:p>
-                      <a:r>
-                        <a:rPr kumimoji="0" lang="en-US" sz="1600" b="1" i="0" kern="1200" dirty="0">
+                        <a:t>MOVEQ</a:t>
+                      </a:r>
+                      <a:r>
+                        <a:rPr kumimoji="0" lang="en-US" sz="1400" b="0" i="0" kern="1200" dirty="0">
                           <a:solidFill>
                             <a:schemeClr val="tx1"/>
                           </a:solidFill>
@@ -29205,10 +29248,12 @@
                           <a:ea typeface="+mn-ea"/>
                           <a:cs typeface="+mn-cs"/>
                         </a:rPr>
-                        <a:t>BLEQ</a:t>
-                      </a:r>
-                      <a:r>
-                        <a:rPr kumimoji="0" lang="en-US" sz="1600" b="0" i="0" kern="1200" dirty="0">
+                        <a:t> r0, #10  </a:t>
+                      </a:r>
+                    </a:p>
+                    <a:p>
+                      <a:r>
+                        <a:rPr kumimoji="0" lang="en-US" sz="1400" b="1" i="0" kern="1200" dirty="0">
                           <a:solidFill>
                             <a:schemeClr val="tx1"/>
                           </a:solidFill>
@@ -29217,10 +29262,10 @@
                           <a:ea typeface="+mn-ea"/>
                           <a:cs typeface="+mn-cs"/>
                         </a:rPr>
-                        <a:t>  </a:t>
-                      </a:r>
-                      <a:r>
-                        <a:rPr kumimoji="0" lang="en-US" sz="1600" b="0" i="0" kern="1200" dirty="0" err="1">
+                        <a:t>BLEQ</a:t>
+                      </a:r>
+                      <a:r>
+                        <a:rPr kumimoji="0" lang="en-US" sz="1400" b="0" i="0" kern="1200" dirty="0">
                           <a:solidFill>
                             <a:schemeClr val="tx1"/>
                           </a:solidFill>
@@ -29229,9 +29274,21 @@
                           <a:ea typeface="+mn-ea"/>
                           <a:cs typeface="+mn-cs"/>
                         </a:rPr>
+                        <a:t>  </a:t>
+                      </a:r>
+                      <a:r>
+                        <a:rPr kumimoji="0" lang="en-US" sz="1400" b="0" i="0" kern="1200" dirty="0" err="1">
+                          <a:solidFill>
+                            <a:schemeClr val="tx1"/>
+                          </a:solidFill>
+                          <a:effectLst/>
+                          <a:latin typeface="Consolas" panose="020B0609020204030204" pitchFamily="49" charset="0"/>
+                          <a:ea typeface="+mn-ea"/>
+                          <a:cs typeface="+mn-cs"/>
+                        </a:rPr>
                         <a:t>fn</a:t>
                       </a:r>
-                      <a:endParaRPr lang="en-US" sz="1600" dirty="0">
+                      <a:endParaRPr lang="en-US" sz="1400" dirty="0">
                         <a:effectLst/>
                         <a:latin typeface="Consolas" panose="020B0609020204030204" pitchFamily="49" charset="0"/>
                         <a:ea typeface="宋体"/>
@@ -29255,7 +29312,7 @@
                         </a:spcAft>
                       </a:pPr>
                       <a:r>
-                        <a:rPr kumimoji="0" lang="en-US" sz="1600" b="0" i="0" kern="1200" dirty="0">
+                        <a:rPr kumimoji="0" lang="en-US" sz="1400" b="0" i="0" kern="1200" dirty="0">
                           <a:solidFill>
                             <a:schemeClr val="tx1"/>
                           </a:solidFill>
@@ -29277,7 +29334,7 @@
                         </a:spcAft>
                       </a:pPr>
                       <a:r>
-                        <a:rPr kumimoji="0" lang="en-US" sz="1600" b="0" i="0" kern="1200" dirty="0">
+                        <a:rPr kumimoji="0" lang="en-US" sz="1400" b="0" i="0" kern="1200" dirty="0">
                           <a:solidFill>
                             <a:schemeClr val="tx1"/>
                           </a:solidFill>
@@ -29299,7 +29356,7 @@
                         </a:spcAft>
                       </a:pPr>
                       <a:r>
-                        <a:rPr kumimoji="0" lang="en-US" sz="1600" b="0" i="0" kern="1200" dirty="0">
+                        <a:rPr kumimoji="0" lang="en-US" sz="1400" b="0" i="0" kern="1200" dirty="0">
                           <a:solidFill>
                             <a:schemeClr val="tx1"/>
                           </a:solidFill>
@@ -29311,7 +29368,7 @@
                         <a:t>  </a:t>
                       </a:r>
                       <a:r>
-                        <a:rPr kumimoji="0" lang="en-US" sz="1600" b="0" i="0" kern="1200" dirty="0" err="1">
+                        <a:rPr kumimoji="0" lang="en-US" sz="1400" b="0" i="0" kern="1200" dirty="0" err="1">
                           <a:solidFill>
                             <a:schemeClr val="tx1"/>
                           </a:solidFill>
@@ -29323,7 +29380,7 @@
                         <a:t>fn</a:t>
                       </a:r>
                       <a:r>
-                        <a:rPr kumimoji="0" lang="en-US" sz="1600" b="0" i="0" kern="1200" dirty="0">
+                        <a:rPr kumimoji="0" lang="en-US" sz="1400" b="0" i="0" kern="1200" dirty="0">
                           <a:solidFill>
                             <a:schemeClr val="tx1"/>
                           </a:solidFill>
@@ -29345,7 +29402,7 @@
                         </a:spcAft>
                       </a:pPr>
                       <a:r>
-                        <a:rPr kumimoji="0" lang="en-US" sz="1600" b="0" i="0" kern="1200" dirty="0">
+                        <a:rPr kumimoji="0" lang="en-US" sz="1400" b="0" i="0" kern="1200" dirty="0">
                           <a:solidFill>
                             <a:schemeClr val="tx1"/>
                           </a:solidFill>
@@ -29356,7 +29413,7 @@
                         </a:rPr>
                         <a:t>}</a:t>
                       </a:r>
-                      <a:endParaRPr lang="en-US" sz="1600" i="0" dirty="0">
+                      <a:endParaRPr lang="en-US" sz="1400" i="0" dirty="0">
                         <a:effectLst/>
                         <a:latin typeface="Consolas" panose="020B0609020204030204" pitchFamily="49" charset="0"/>
                         <a:cs typeface="Consolas" panose="020B0609020204030204" pitchFamily="49" charset="0"/>
@@ -29390,7 +29447,7 @@
           <p:nvPr/>
         </p:nvGraphicFramePr>
         <p:xfrm>
-          <a:off x="751114" y="3559629"/>
+          <a:off x="751114" y="3520440"/>
           <a:ext cx="7391400" cy="1219200"/>
         </p:xfrm>
         <a:graphic>
@@ -29430,7 +29487,7 @@
                         </a:spcAft>
                       </a:pPr>
                       <a:r>
-                        <a:rPr lang="en-US" sz="1600" dirty="0">
+                        <a:rPr lang="en-US" sz="1400" dirty="0">
                           <a:solidFill>
                             <a:schemeClr val="bg1"/>
                           </a:solidFill>
@@ -29440,7 +29497,7 @@
                         </a:rPr>
                         <a:t>Assembly Program</a:t>
                       </a:r>
-                      <a:endParaRPr lang="en-US" sz="1600" dirty="0">
+                      <a:endParaRPr lang="en-US" sz="1400" dirty="0">
                         <a:solidFill>
                           <a:schemeClr val="bg1"/>
                         </a:solidFill>
@@ -29471,7 +29528,7 @@
                         </a:spcAft>
                       </a:pPr>
                       <a:r>
-                        <a:rPr lang="en-US" sz="1600" dirty="0">
+                        <a:rPr lang="en-US" sz="1400" dirty="0">
                           <a:solidFill>
                             <a:schemeClr val="bg1"/>
                           </a:solidFill>
@@ -29481,7 +29538,7 @@
                         </a:rPr>
                         <a:t>C Program</a:t>
                       </a:r>
-                      <a:endParaRPr lang="en-US" sz="1600" dirty="0">
+                      <a:endParaRPr lang="en-US" sz="1400" dirty="0">
                         <a:solidFill>
                           <a:schemeClr val="bg1"/>
                         </a:solidFill>
@@ -29511,7 +29568,7 @@
                     <a:lstStyle/>
                     <a:p>
                       <a:r>
-                        <a:rPr kumimoji="0" lang="pt-BR" sz="1600" b="1" i="0" kern="1200" dirty="0">
+                        <a:rPr kumimoji="0" lang="pt-BR" sz="1400" b="1" i="0" kern="1200" dirty="0">
                           <a:solidFill>
                             <a:schemeClr val="tx1"/>
                           </a:solidFill>
@@ -29523,7 +29580,7 @@
                         <a:t>CMP</a:t>
                       </a:r>
                       <a:r>
-                        <a:rPr kumimoji="0" lang="pt-BR" sz="1600" b="0" i="0" kern="1200" dirty="0">
+                        <a:rPr kumimoji="0" lang="pt-BR" sz="1400" b="0" i="0" kern="1200" dirty="0">
                           <a:solidFill>
                             <a:schemeClr val="tx1"/>
                           </a:solidFill>
@@ -29537,7 +29594,7 @@
                     </a:p>
                     <a:p>
                       <a:r>
-                        <a:rPr kumimoji="0" lang="pt-BR" sz="1600" b="1" i="0" kern="1200" dirty="0">
+                        <a:rPr kumimoji="0" lang="pt-BR" sz="1400" b="1" i="0" kern="1200" dirty="0">
                           <a:solidFill>
                             <a:schemeClr val="tx1"/>
                           </a:solidFill>
@@ -29546,10 +29603,12 @@
                           <a:ea typeface="+mn-ea"/>
                           <a:cs typeface="+mn-cs"/>
                         </a:rPr>
-                        <a:t>MOVLE</a:t>
-                      </a:r>
-                      <a:r>
-                        <a:rPr kumimoji="0" lang="pt-BR" sz="1600" b="0" i="0" kern="1200" dirty="0">
+                        <a:t>ITE LE</a:t>
+                      </a:r>
+                    </a:p>
+                    <a:p>
+                      <a:r>
+                        <a:rPr kumimoji="0" lang="pt-BR" sz="1400" b="1" i="0" kern="1200" dirty="0">
                           <a:solidFill>
                             <a:schemeClr val="tx1"/>
                           </a:solidFill>
@@ -29558,12 +29617,10 @@
                           <a:ea typeface="+mn-ea"/>
                           <a:cs typeface="+mn-cs"/>
                         </a:rPr>
-                        <a:t> r0, #0   </a:t>
-                      </a:r>
-                    </a:p>
-                    <a:p>
-                      <a:r>
-                        <a:rPr kumimoji="0" lang="pt-BR" sz="1600" b="1" i="0" kern="1200" dirty="0">
+                        <a:t>MOVLE</a:t>
+                      </a:r>
+                      <a:r>
+                        <a:rPr kumimoji="0" lang="pt-BR" sz="1400" b="0" i="0" kern="1200" dirty="0">
                           <a:solidFill>
                             <a:schemeClr val="tx1"/>
                           </a:solidFill>
@@ -29572,10 +29629,12 @@
                           <a:ea typeface="+mn-ea"/>
                           <a:cs typeface="+mn-cs"/>
                         </a:rPr>
-                        <a:t>MOVGT</a:t>
-                      </a:r>
-                      <a:r>
-                        <a:rPr kumimoji="0" lang="pt-BR" sz="1600" b="0" i="0" kern="1200" dirty="0">
+                        <a:t> r0, #0   </a:t>
+                      </a:r>
+                    </a:p>
+                    <a:p>
+                      <a:r>
+                        <a:rPr kumimoji="0" lang="pt-BR" sz="1400" b="1" i="0" kern="1200" dirty="0">
                           <a:solidFill>
                             <a:schemeClr val="tx1"/>
                           </a:solidFill>
@@ -29584,9 +29643,21 @@
                           <a:ea typeface="+mn-ea"/>
                           <a:cs typeface="+mn-cs"/>
                         </a:rPr>
+                        <a:t>MOVGT</a:t>
+                      </a:r>
+                      <a:r>
+                        <a:rPr kumimoji="0" lang="pt-BR" sz="1400" b="0" i="0" kern="1200" dirty="0">
+                          <a:solidFill>
+                            <a:schemeClr val="tx1"/>
+                          </a:solidFill>
+                          <a:effectLst/>
+                          <a:latin typeface="Consolas" panose="020B0609020204030204" pitchFamily="49" charset="0"/>
+                          <a:ea typeface="+mn-ea"/>
+                          <a:cs typeface="+mn-cs"/>
+                        </a:rPr>
                         <a:t> r0, #1</a:t>
                       </a:r>
-                      <a:endParaRPr lang="en-US" sz="1600" dirty="0">
+                      <a:endParaRPr lang="en-US" sz="1400" dirty="0">
                         <a:effectLst/>
                         <a:latin typeface="Consolas" panose="020B0609020204030204" pitchFamily="49" charset="0"/>
                         <a:ea typeface="宋体"/>
@@ -29601,28 +29672,28 @@
                     <a:bodyPr/>
                     <a:lstStyle/>
                     <a:p>
-                      <a:endParaRPr lang="en-US" sz="1600" i="0" dirty="0">
+                      <a:endParaRPr lang="en-US" sz="1400" i="0" dirty="0">
                         <a:effectLst/>
                         <a:latin typeface="Consolas" panose="020B0609020204030204" pitchFamily="49" charset="0"/>
                         <a:cs typeface="Consolas" panose="020B0609020204030204" pitchFamily="49" charset="0"/>
                       </a:endParaRPr>
                     </a:p>
                     <a:p>
-                      <a:endParaRPr lang="en-US" sz="1600" i="0" dirty="0">
+                      <a:endParaRPr lang="en-US" sz="1400" i="0" dirty="0">
                         <a:effectLst/>
                         <a:latin typeface="Consolas" panose="020B0609020204030204" pitchFamily="49" charset="0"/>
                         <a:cs typeface="Consolas" panose="020B0609020204030204" pitchFamily="49" charset="0"/>
                       </a:endParaRPr>
                     </a:p>
                     <a:p>
-                      <a:endParaRPr lang="en-US" sz="1600" i="0" dirty="0">
+                      <a:endParaRPr lang="en-US" sz="1400" i="0" dirty="0">
                         <a:effectLst/>
                         <a:latin typeface="Consolas" panose="020B0609020204030204" pitchFamily="49" charset="0"/>
                         <a:cs typeface="Consolas" panose="020B0609020204030204" pitchFamily="49" charset="0"/>
                       </a:endParaRPr>
                     </a:p>
                     <a:p>
-                      <a:endParaRPr lang="en-US" sz="1600" i="0" dirty="0">
+                      <a:endParaRPr lang="en-US" sz="1400" i="0" dirty="0">
                         <a:effectLst/>
                         <a:latin typeface="Consolas" panose="020B0609020204030204" pitchFamily="49" charset="0"/>
                         <a:cs typeface="Consolas" panose="020B0609020204030204" pitchFamily="49" charset="0"/>
@@ -29656,7 +29727,7 @@
           <p:nvPr/>
         </p:nvGraphicFramePr>
         <p:xfrm>
-          <a:off x="751114" y="4822372"/>
+          <a:off x="751114" y="4745736"/>
           <a:ext cx="7391400" cy="1017070"/>
         </p:xfrm>
         <a:graphic>
@@ -29696,7 +29767,7 @@
                         </a:spcAft>
                       </a:pPr>
                       <a:r>
-                        <a:rPr lang="en-US" sz="1600" dirty="0">
+                        <a:rPr lang="en-US" sz="1400" dirty="0">
                           <a:solidFill>
                             <a:schemeClr val="bg1"/>
                           </a:solidFill>
@@ -29706,7 +29777,7 @@
                         </a:rPr>
                         <a:t>Assembly Program</a:t>
                       </a:r>
-                      <a:endParaRPr lang="en-US" sz="1600" dirty="0">
+                      <a:endParaRPr lang="en-US" sz="1400" dirty="0">
                         <a:solidFill>
                           <a:schemeClr val="bg1"/>
                         </a:solidFill>
@@ -29737,7 +29808,7 @@
                         </a:spcAft>
                       </a:pPr>
                       <a:r>
-                        <a:rPr lang="en-US" sz="1600" dirty="0">
+                        <a:rPr lang="en-US" sz="1400" dirty="0">
                           <a:solidFill>
                             <a:schemeClr val="bg1"/>
                           </a:solidFill>
@@ -29748,7 +29819,7 @@
                         <a:t>C </a:t>
                       </a:r>
                       <a:r>
-                        <a:rPr lang="en-US" sz="1600" dirty="0" err="1">
+                        <a:rPr lang="en-US" sz="1400" dirty="0" err="1">
                           <a:solidFill>
                             <a:schemeClr val="bg1"/>
                           </a:solidFill>
@@ -29756,9 +29827,9 @@
                           <a:latin typeface="Consolas" panose="020B0609020204030204" pitchFamily="49" charset="0"/>
                           <a:cs typeface="Consolas" panose="020B0609020204030204" pitchFamily="49" charset="0"/>
                         </a:rPr>
-                        <a:t>rogram</a:t>
-                      </a:r>
-                      <a:endParaRPr lang="en-US" sz="1600" dirty="0">
+                        <a:t>Program</a:t>
+                      </a:r>
+                      <a:endParaRPr lang="en-US" sz="1400" dirty="0">
                         <a:solidFill>
                           <a:schemeClr val="bg1"/>
                         </a:solidFill>
@@ -29788,7 +29859,7 @@
                     <a:lstStyle/>
                     <a:p>
                       <a:r>
-                        <a:rPr kumimoji="0" lang="pt-BR" sz="1600" b="1" i="0" kern="1200" dirty="0">
+                        <a:rPr kumimoji="0" lang="pt-BR" sz="1400" b="1" i="0" kern="1200" dirty="0">
                           <a:solidFill>
                             <a:schemeClr val="tx1"/>
                           </a:solidFill>
@@ -29800,7 +29871,7 @@
                         <a:t>CMP</a:t>
                       </a:r>
                       <a:r>
-                        <a:rPr kumimoji="0" lang="pt-BR" sz="1600" b="0" i="0" kern="1200" dirty="0">
+                        <a:rPr kumimoji="0" lang="pt-BR" sz="1400" b="0" i="0" kern="1200" dirty="0">
                           <a:solidFill>
                             <a:schemeClr val="tx1"/>
                           </a:solidFill>
@@ -29812,7 +29883,7 @@
                         <a:t>   r0, #'A’</a:t>
                       </a:r>
                       <a:r>
-                        <a:rPr kumimoji="0" lang="pt-BR" sz="1600" b="0" i="1" kern="1200" dirty="0">
+                        <a:rPr kumimoji="0" lang="pt-BR" sz="1400" b="0" i="1" kern="1200" dirty="0">
                           <a:solidFill>
                             <a:schemeClr val="tx1"/>
                           </a:solidFill>
@@ -29826,7 +29897,7 @@
                     </a:p>
                     <a:p>
                       <a:r>
-                        <a:rPr kumimoji="0" lang="pt-BR" sz="1600" b="1" i="0" kern="1200" dirty="0">
+                        <a:rPr kumimoji="0" lang="pt-BR" sz="1400" b="1" i="0" kern="1200" dirty="0">
                           <a:solidFill>
                             <a:schemeClr val="tx1"/>
                           </a:solidFill>
@@ -29835,10 +29906,12 @@
                           <a:ea typeface="+mn-ea"/>
                           <a:cs typeface="+mn-cs"/>
                         </a:rPr>
-                        <a:t>CMPNE</a:t>
-                      </a:r>
-                      <a:r>
-                        <a:rPr kumimoji="0" lang="pt-BR" sz="1600" b="0" i="0" kern="1200" dirty="0">
+                        <a:t>ITE NE</a:t>
+                      </a:r>
+                    </a:p>
+                    <a:p>
+                      <a:r>
+                        <a:rPr kumimoji="0" lang="pt-BR" sz="1400" b="1" i="0" kern="1200" dirty="0">
                           <a:solidFill>
                             <a:schemeClr val="tx1"/>
                           </a:solidFill>
@@ -29847,10 +29920,10 @@
                           <a:ea typeface="+mn-ea"/>
                           <a:cs typeface="+mn-cs"/>
                         </a:rPr>
-                        <a:t> r0, #'</a:t>
-                      </a:r>
-                      <a:r>
-                        <a:rPr kumimoji="0" lang="pt-BR" sz="1600" b="1" i="0" kern="1200" dirty="0">
+                        <a:t>CMPNE</a:t>
+                      </a:r>
+                      <a:r>
+                        <a:rPr kumimoji="0" lang="pt-BR" sz="1400" b="0" i="0" kern="1200" dirty="0">
                           <a:solidFill>
                             <a:schemeClr val="tx1"/>
                           </a:solidFill>
@@ -29859,10 +29932,10 @@
                           <a:ea typeface="+mn-ea"/>
                           <a:cs typeface="+mn-cs"/>
                         </a:rPr>
-                        <a:t>B</a:t>
-                      </a:r>
-                      <a:r>
-                        <a:rPr kumimoji="0" lang="pt-BR" sz="1600" b="0" i="0" kern="1200" dirty="0">
+                        <a:t> r0, #'</a:t>
+                      </a:r>
+                      <a:r>
+                        <a:rPr kumimoji="0" lang="pt-BR" sz="1400" b="1" i="0" kern="1200" dirty="0">
                           <a:solidFill>
                             <a:schemeClr val="tx1"/>
                           </a:solidFill>
@@ -29871,12 +29944,10 @@
                           <a:ea typeface="+mn-ea"/>
                           <a:cs typeface="+mn-cs"/>
                         </a:rPr>
-                        <a:t>'</a:t>
-                      </a:r>
-                    </a:p>
-                    <a:p>
-                      <a:r>
-                        <a:rPr kumimoji="0" lang="pt-BR" sz="1600" b="1" i="0" kern="1200" dirty="0">
+                        <a:t>B</a:t>
+                      </a:r>
+                      <a:r>
+                        <a:rPr kumimoji="0" lang="pt-BR" sz="1400" b="0" i="0" kern="1200" dirty="0">
                           <a:solidFill>
                             <a:schemeClr val="tx1"/>
                           </a:solidFill>
@@ -29885,10 +29956,24 @@
                           <a:ea typeface="+mn-ea"/>
                           <a:cs typeface="+mn-cs"/>
                         </a:rPr>
+                        <a:t>'</a:t>
+                      </a:r>
+                    </a:p>
+                    <a:p>
+                      <a:r>
+                        <a:rPr kumimoji="0" lang="pt-BR" sz="1400" b="1" i="0" kern="1200" dirty="0">
+                          <a:solidFill>
+                            <a:schemeClr val="tx1"/>
+                          </a:solidFill>
+                          <a:effectLst/>
+                          <a:latin typeface="Consolas" panose="020B0609020204030204" pitchFamily="49" charset="0"/>
+                          <a:ea typeface="+mn-ea"/>
+                          <a:cs typeface="+mn-cs"/>
+                        </a:rPr>
                         <a:t>MOVEQ</a:t>
                       </a:r>
                       <a:r>
-                        <a:rPr kumimoji="0" lang="pt-BR" sz="1600" b="0" i="0" kern="1200" dirty="0">
+                        <a:rPr kumimoji="0" lang="pt-BR" sz="1400" b="0" i="0" kern="1200" dirty="0">
                           <a:solidFill>
                             <a:schemeClr val="tx1"/>
                           </a:solidFill>
@@ -29908,7 +29993,7 @@
                     <a:bodyPr/>
                     <a:lstStyle/>
                     <a:p>
-                      <a:endParaRPr lang="en-US" sz="1600" i="0" dirty="0">
+                      <a:endParaRPr lang="en-US" sz="1400" i="0" dirty="0">
                         <a:effectLst/>
                         <a:latin typeface="Consolas" panose="020B0609020204030204" pitchFamily="49" charset="0"/>
                         <a:cs typeface="Consolas" panose="020B0609020204030204" pitchFamily="49" charset="0"/>
@@ -30042,7 +30127,7 @@
           </p:nvPr>
         </p:nvGraphicFramePr>
         <p:xfrm>
-          <a:off x="990600" y="1295400"/>
+          <a:off x="990600" y="1280160"/>
           <a:ext cx="7391400" cy="1219200"/>
         </p:xfrm>
         <a:graphic>
@@ -30082,7 +30167,7 @@
                         </a:spcAft>
                       </a:pPr>
                       <a:r>
-                        <a:rPr lang="en-US" sz="1600" dirty="0">
+                        <a:rPr lang="en-US" sz="1200" dirty="0">
                           <a:solidFill>
                             <a:schemeClr val="bg1"/>
                           </a:solidFill>
@@ -30092,7 +30177,7 @@
                         </a:rPr>
                         <a:t>Assembly Program</a:t>
                       </a:r>
-                      <a:endParaRPr lang="en-US" sz="1600" dirty="0">
+                      <a:endParaRPr lang="en-US" sz="1200" dirty="0">
                         <a:solidFill>
                           <a:schemeClr val="bg1"/>
                         </a:solidFill>
@@ -30123,7 +30208,7 @@
                         </a:spcAft>
                       </a:pPr>
                       <a:r>
-                        <a:rPr lang="en-US" sz="1600" dirty="0">
+                        <a:rPr lang="en-US" sz="1200" dirty="0">
                           <a:solidFill>
                             <a:schemeClr val="bg1"/>
                           </a:solidFill>
@@ -30133,7 +30218,7 @@
                         </a:rPr>
                         <a:t>C Program</a:t>
                       </a:r>
-                      <a:endParaRPr lang="en-US" sz="1600" dirty="0">
+                      <a:endParaRPr lang="en-US" sz="1200" dirty="0">
                         <a:solidFill>
                           <a:schemeClr val="bg1"/>
                         </a:solidFill>
@@ -30163,7 +30248,7 @@
                     <a:lstStyle/>
                     <a:p>
                       <a:r>
-                        <a:rPr kumimoji="0" lang="en-US" sz="1600" b="1" i="0" kern="1200" dirty="0">
+                        <a:rPr kumimoji="0" lang="en-US" sz="1200" b="1" i="0" kern="1200" dirty="0">
                           <a:solidFill>
                             <a:schemeClr val="tx1"/>
                           </a:solidFill>
@@ -30175,7 +30260,7 @@
                         <a:t>CMP</a:t>
                       </a:r>
                       <a:r>
-                        <a:rPr kumimoji="0" lang="en-US" sz="1600" b="0" i="0" kern="1200" dirty="0">
+                        <a:rPr kumimoji="0" lang="en-US" sz="1200" b="0" i="0" kern="1200" dirty="0">
                           <a:solidFill>
                             <a:schemeClr val="tx1"/>
                           </a:solidFill>
@@ -30189,7 +30274,7 @@
                     </a:p>
                     <a:p>
                       <a:r>
-                        <a:rPr kumimoji="0" lang="en-US" sz="1600" b="1" i="0" kern="1200" dirty="0">
+                        <a:rPr kumimoji="0" lang="en-US" sz="1200" b="1" i="0" kern="1200" dirty="0">
                           <a:solidFill>
                             <a:schemeClr val="tx1"/>
                           </a:solidFill>
@@ -30198,10 +30283,12 @@
                           <a:ea typeface="+mn-ea"/>
                           <a:cs typeface="+mn-cs"/>
                         </a:rPr>
-                        <a:t>MOVEQ</a:t>
-                      </a:r>
-                      <a:r>
-                        <a:rPr kumimoji="0" lang="en-US" sz="1600" b="0" i="0" kern="1200" dirty="0">
+                        <a:t>ITT EQ</a:t>
+                      </a:r>
+                    </a:p>
+                    <a:p>
+                      <a:r>
+                        <a:rPr kumimoji="0" lang="en-US" sz="1200" b="1" i="0" kern="1200" dirty="0">
                           <a:solidFill>
                             <a:schemeClr val="tx1"/>
                           </a:solidFill>
@@ -30210,12 +30297,10 @@
                           <a:ea typeface="+mn-ea"/>
                           <a:cs typeface="+mn-cs"/>
                         </a:rPr>
-                        <a:t> r0, #10  </a:t>
-                      </a:r>
-                    </a:p>
-                    <a:p>
-                      <a:r>
-                        <a:rPr kumimoji="0" lang="en-US" sz="1600" b="1" i="0" kern="1200" dirty="0">
+                        <a:t>MOVEQ</a:t>
+                      </a:r>
+                      <a:r>
+                        <a:rPr kumimoji="0" lang="en-US" sz="1200" b="0" i="0" kern="1200" dirty="0">
                           <a:solidFill>
                             <a:schemeClr val="tx1"/>
                           </a:solidFill>
@@ -30224,10 +30309,12 @@
                           <a:ea typeface="+mn-ea"/>
                           <a:cs typeface="+mn-cs"/>
                         </a:rPr>
-                        <a:t>BLEQ</a:t>
-                      </a:r>
-                      <a:r>
-                        <a:rPr kumimoji="0" lang="en-US" sz="1600" b="0" i="0" kern="1200" dirty="0">
+                        <a:t> r0, #10  </a:t>
+                      </a:r>
+                    </a:p>
+                    <a:p>
+                      <a:r>
+                        <a:rPr kumimoji="0" lang="en-US" sz="1200" b="1" i="0" kern="1200" dirty="0">
                           <a:solidFill>
                             <a:schemeClr val="tx1"/>
                           </a:solidFill>
@@ -30236,10 +30323,10 @@
                           <a:ea typeface="+mn-ea"/>
                           <a:cs typeface="+mn-cs"/>
                         </a:rPr>
-                        <a:t>  </a:t>
-                      </a:r>
-                      <a:r>
-                        <a:rPr kumimoji="0" lang="en-US" sz="1600" b="0" i="0" kern="1200" dirty="0" err="1">
+                        <a:t>BLEQ</a:t>
+                      </a:r>
+                      <a:r>
+                        <a:rPr kumimoji="0" lang="en-US" sz="1200" b="0" i="0" kern="1200" dirty="0">
                           <a:solidFill>
                             <a:schemeClr val="tx1"/>
                           </a:solidFill>
@@ -30248,9 +30335,21 @@
                           <a:ea typeface="+mn-ea"/>
                           <a:cs typeface="+mn-cs"/>
                         </a:rPr>
+                        <a:t>  </a:t>
+                      </a:r>
+                      <a:r>
+                        <a:rPr kumimoji="0" lang="en-US" sz="1200" b="0" i="0" kern="1200" dirty="0" err="1">
+                          <a:solidFill>
+                            <a:schemeClr val="tx1"/>
+                          </a:solidFill>
+                          <a:effectLst/>
+                          <a:latin typeface="Consolas" panose="020B0609020204030204" pitchFamily="49" charset="0"/>
+                          <a:ea typeface="+mn-ea"/>
+                          <a:cs typeface="+mn-cs"/>
+                        </a:rPr>
                         <a:t>fn</a:t>
                       </a:r>
-                      <a:endParaRPr lang="en-US" sz="1600" dirty="0">
+                      <a:endParaRPr lang="en-US" sz="1200" dirty="0">
                         <a:effectLst/>
                         <a:latin typeface="Consolas" panose="020B0609020204030204" pitchFamily="49" charset="0"/>
                         <a:ea typeface="宋体"/>
@@ -30274,7 +30373,7 @@
                         </a:spcAft>
                       </a:pPr>
                       <a:r>
-                        <a:rPr kumimoji="0" lang="en-US" sz="1600" b="0" i="0" kern="1200" dirty="0">
+                        <a:rPr kumimoji="0" lang="en-US" sz="1200" b="0" i="0" kern="1200" dirty="0">
                           <a:solidFill>
                             <a:schemeClr val="tx1"/>
                           </a:solidFill>
@@ -30296,7 +30395,7 @@
                         </a:spcAft>
                       </a:pPr>
                       <a:r>
-                        <a:rPr kumimoji="0" lang="en-US" sz="1600" b="0" i="0" kern="1200" dirty="0">
+                        <a:rPr kumimoji="0" lang="en-US" sz="1200" b="0" i="0" kern="1200" dirty="0">
                           <a:solidFill>
                             <a:schemeClr val="tx1"/>
                           </a:solidFill>
@@ -30318,7 +30417,7 @@
                         </a:spcAft>
                       </a:pPr>
                       <a:r>
-                        <a:rPr kumimoji="0" lang="en-US" sz="1600" b="0" i="0" kern="1200" dirty="0">
+                        <a:rPr kumimoji="0" lang="en-US" sz="1200" b="0" i="0" kern="1200" dirty="0">
                           <a:solidFill>
                             <a:schemeClr val="tx1"/>
                           </a:solidFill>
@@ -30330,7 +30429,7 @@
                         <a:t>  </a:t>
                       </a:r>
                       <a:r>
-                        <a:rPr kumimoji="0" lang="en-US" sz="1600" b="0" i="0" kern="1200" dirty="0" err="1">
+                        <a:rPr kumimoji="0" lang="en-US" sz="1200" b="0" i="0" kern="1200" dirty="0" err="1">
                           <a:solidFill>
                             <a:schemeClr val="tx1"/>
                           </a:solidFill>
@@ -30342,7 +30441,7 @@
                         <a:t>fn</a:t>
                       </a:r>
                       <a:r>
-                        <a:rPr kumimoji="0" lang="en-US" sz="1600" b="0" i="0" kern="1200" dirty="0">
+                        <a:rPr kumimoji="0" lang="en-US" sz="1200" b="0" i="0" kern="1200" dirty="0">
                           <a:solidFill>
                             <a:schemeClr val="tx1"/>
                           </a:solidFill>
@@ -30364,7 +30463,7 @@
                         </a:spcAft>
                       </a:pPr>
                       <a:r>
-                        <a:rPr kumimoji="0" lang="en-US" sz="1600" b="0" i="0" kern="1200" dirty="0">
+                        <a:rPr kumimoji="0" lang="en-US" sz="1200" b="0" i="0" kern="1200" dirty="0">
                           <a:solidFill>
                             <a:schemeClr val="tx1"/>
                           </a:solidFill>
@@ -30375,7 +30474,7 @@
                         </a:rPr>
                         <a:t>}</a:t>
                       </a:r>
-                      <a:endParaRPr lang="en-US" sz="1600" i="0" dirty="0">
+                      <a:endParaRPr lang="en-US" sz="1200" i="0" dirty="0">
                         <a:effectLst/>
                         <a:latin typeface="Consolas" panose="020B0609020204030204" pitchFamily="49" charset="0"/>
                         <a:cs typeface="Consolas" panose="020B0609020204030204" pitchFamily="49" charset="0"/>
@@ -30415,7 +30514,7 @@
           </p:nvPr>
         </p:nvGraphicFramePr>
         <p:xfrm>
-          <a:off x="990600" y="2558143"/>
+          <a:off x="990600" y="2395728"/>
           <a:ext cx="7391400" cy="1219200"/>
         </p:xfrm>
         <a:graphic>
@@ -30455,7 +30554,7 @@
                         </a:spcAft>
                       </a:pPr>
                       <a:r>
-                        <a:rPr lang="en-US" sz="1600" dirty="0">
+                        <a:rPr lang="en-US" sz="1200" dirty="0">
                           <a:solidFill>
                             <a:schemeClr val="bg1"/>
                           </a:solidFill>
@@ -30465,7 +30564,7 @@
                         </a:rPr>
                         <a:t>Assembly Program</a:t>
                       </a:r>
-                      <a:endParaRPr lang="en-US" sz="1600" dirty="0">
+                      <a:endParaRPr lang="en-US" sz="1200" dirty="0">
                         <a:solidFill>
                           <a:schemeClr val="bg1"/>
                         </a:solidFill>
@@ -30496,7 +30595,7 @@
                         </a:spcAft>
                       </a:pPr>
                       <a:r>
-                        <a:rPr lang="en-US" sz="1600" dirty="0">
+                        <a:rPr lang="en-US" sz="1200" dirty="0">
                           <a:solidFill>
                             <a:schemeClr val="bg1"/>
                           </a:solidFill>
@@ -30506,7 +30605,7 @@
                         </a:rPr>
                         <a:t>C Program</a:t>
                       </a:r>
-                      <a:endParaRPr lang="en-US" sz="1600" dirty="0">
+                      <a:endParaRPr lang="en-US" sz="1200" dirty="0">
                         <a:solidFill>
                           <a:schemeClr val="bg1"/>
                         </a:solidFill>
@@ -30536,7 +30635,7 @@
                     <a:lstStyle/>
                     <a:p>
                       <a:r>
-                        <a:rPr kumimoji="0" lang="pt-BR" sz="1600" b="1" i="0" kern="1200" dirty="0">
+                        <a:rPr kumimoji="0" lang="pt-BR" sz="1200" b="1" i="0" kern="1200" dirty="0">
                           <a:solidFill>
                             <a:schemeClr val="tx1"/>
                           </a:solidFill>
@@ -30548,7 +30647,7 @@
                         <a:t>CMP</a:t>
                       </a:r>
                       <a:r>
-                        <a:rPr kumimoji="0" lang="pt-BR" sz="1600" b="0" i="0" kern="1200" dirty="0">
+                        <a:rPr kumimoji="0" lang="pt-BR" sz="1200" b="0" i="0" kern="1200" dirty="0">
                           <a:solidFill>
                             <a:schemeClr val="tx1"/>
                           </a:solidFill>
@@ -30562,7 +30661,7 @@
                     </a:p>
                     <a:p>
                       <a:r>
-                        <a:rPr kumimoji="0" lang="pt-BR" sz="1600" b="1" i="0" kern="1200" dirty="0">
+                        <a:rPr kumimoji="0" lang="pt-BR" sz="1200" b="1" i="0" kern="1200" dirty="0">
                           <a:solidFill>
                             <a:schemeClr val="tx1"/>
                           </a:solidFill>
@@ -30571,10 +30670,12 @@
                           <a:ea typeface="+mn-ea"/>
                           <a:cs typeface="+mn-cs"/>
                         </a:rPr>
-                        <a:t>MOVLE</a:t>
-                      </a:r>
-                      <a:r>
-                        <a:rPr kumimoji="0" lang="pt-BR" sz="1600" b="0" i="0" kern="1200" dirty="0">
+                        <a:t>ITE LE</a:t>
+                      </a:r>
+                    </a:p>
+                    <a:p>
+                      <a:r>
+                        <a:rPr kumimoji="0" lang="pt-BR" sz="1200" b="1" i="0" kern="1200" dirty="0">
                           <a:solidFill>
                             <a:schemeClr val="tx1"/>
                           </a:solidFill>
@@ -30583,12 +30684,10 @@
                           <a:ea typeface="+mn-ea"/>
                           <a:cs typeface="+mn-cs"/>
                         </a:rPr>
-                        <a:t> r0, #0   </a:t>
-                      </a:r>
-                    </a:p>
-                    <a:p>
-                      <a:r>
-                        <a:rPr kumimoji="0" lang="pt-BR" sz="1600" b="1" i="0" kern="1200" dirty="0">
+                        <a:t>MOVLE</a:t>
+                      </a:r>
+                      <a:r>
+                        <a:rPr kumimoji="0" lang="pt-BR" sz="1200" b="0" i="0" kern="1200" dirty="0">
                           <a:solidFill>
                             <a:schemeClr val="tx1"/>
                           </a:solidFill>
@@ -30597,10 +30696,12 @@
                           <a:ea typeface="+mn-ea"/>
                           <a:cs typeface="+mn-cs"/>
                         </a:rPr>
-                        <a:t>MOVGT</a:t>
-                      </a:r>
-                      <a:r>
-                        <a:rPr kumimoji="0" lang="pt-BR" sz="1600" b="0" i="0" kern="1200" dirty="0">
+                        <a:t> r0, #0   </a:t>
+                      </a:r>
+                    </a:p>
+                    <a:p>
+                      <a:r>
+                        <a:rPr kumimoji="0" lang="pt-BR" sz="1200" b="1" i="0" kern="1200" dirty="0">
                           <a:solidFill>
                             <a:schemeClr val="tx1"/>
                           </a:solidFill>
@@ -30609,9 +30710,21 @@
                           <a:ea typeface="+mn-ea"/>
                           <a:cs typeface="+mn-cs"/>
                         </a:rPr>
+                        <a:t>MOVGT</a:t>
+                      </a:r>
+                      <a:r>
+                        <a:rPr kumimoji="0" lang="pt-BR" sz="1200" b="0" i="0" kern="1200" dirty="0">
+                          <a:solidFill>
+                            <a:schemeClr val="tx1"/>
+                          </a:solidFill>
+                          <a:effectLst/>
+                          <a:latin typeface="Consolas" panose="020B0609020204030204" pitchFamily="49" charset="0"/>
+                          <a:ea typeface="+mn-ea"/>
+                          <a:cs typeface="+mn-cs"/>
+                        </a:rPr>
                         <a:t> r0, #1</a:t>
                       </a:r>
-                      <a:endParaRPr lang="en-US" sz="1600" dirty="0">
+                      <a:endParaRPr lang="en-US" sz="1200" dirty="0">
                         <a:effectLst/>
                         <a:latin typeface="Consolas" panose="020B0609020204030204" pitchFamily="49" charset="0"/>
                         <a:ea typeface="宋体"/>
@@ -30627,7 +30740,7 @@
                     <a:lstStyle/>
                     <a:p>
                       <a:r>
-                        <a:rPr kumimoji="0" lang="pt-BR" sz="1600" b="0" i="0" kern="1200" dirty="0">
+                        <a:rPr kumimoji="0" lang="pt-BR" sz="1200" b="0" i="0" kern="1200" dirty="0">
                           <a:solidFill>
                             <a:schemeClr val="tx1"/>
                           </a:solidFill>
@@ -30641,7 +30754,7 @@
                     </a:p>
                     <a:p>
                       <a:r>
-                        <a:rPr kumimoji="0" lang="en-US" sz="1600" b="0" i="0" kern="1200" dirty="0">
+                        <a:rPr kumimoji="0" lang="en-US" sz="1200" b="0" i="0" kern="1200" dirty="0">
                           <a:solidFill>
                             <a:schemeClr val="tx1"/>
                           </a:solidFill>
@@ -30653,7 +30766,7 @@
                         <a:t>  </a:t>
                       </a:r>
                       <a:r>
-                        <a:rPr kumimoji="0" lang="pt-BR" sz="1600" b="0" i="0" kern="1200" dirty="0">
+                        <a:rPr kumimoji="0" lang="pt-BR" sz="1200" b="0" i="0" kern="1200" dirty="0">
                           <a:solidFill>
                             <a:schemeClr val="tx1"/>
                           </a:solidFill>
@@ -30665,7 +30778,7 @@
                         <a:t>x = 0</a:t>
                       </a:r>
                       <a:r>
-                        <a:rPr kumimoji="0" lang="en-US" sz="1600" b="0" i="0" kern="1200" dirty="0">
+                        <a:rPr kumimoji="0" lang="en-US" sz="1200" b="0" i="0" kern="1200" dirty="0">
                           <a:solidFill>
                             <a:schemeClr val="tx1"/>
                           </a:solidFill>
@@ -30676,7 +30789,7 @@
                         </a:rPr>
                         <a:t>;</a:t>
                       </a:r>
-                      <a:endParaRPr kumimoji="0" lang="pt-BR" sz="1600" b="0" i="0" kern="1200" dirty="0">
+                      <a:endParaRPr kumimoji="0" lang="pt-BR" sz="1200" b="0" i="0" kern="1200" dirty="0">
                         <a:solidFill>
                           <a:schemeClr val="tx1"/>
                         </a:solidFill>
@@ -30696,7 +30809,7 @@
                         </a:spcAft>
                       </a:pPr>
                       <a:r>
-                        <a:rPr kumimoji="0" lang="pt-BR" sz="1600" b="0" i="0" kern="1200" dirty="0">
+                        <a:rPr kumimoji="0" lang="pt-BR" sz="1200" b="0" i="0" kern="1200" dirty="0">
                           <a:solidFill>
                             <a:schemeClr val="tx1"/>
                           </a:solidFill>
@@ -30718,7 +30831,7 @@
                         </a:spcAft>
                       </a:pPr>
                       <a:r>
-                        <a:rPr kumimoji="0" lang="pt-BR" sz="1600" b="0" i="0" kern="1200" dirty="0">
+                        <a:rPr kumimoji="0" lang="pt-BR" sz="1200" b="0" i="0" kern="1200" dirty="0">
                           <a:solidFill>
                             <a:schemeClr val="tx1"/>
                           </a:solidFill>
@@ -30730,7 +30843,7 @@
                         <a:t>  x = 1</a:t>
                       </a:r>
                       <a:r>
-                        <a:rPr kumimoji="0" lang="en-US" sz="1600" b="0" i="0" kern="1200" dirty="0">
+                        <a:rPr kumimoji="0" lang="en-US" sz="1200" b="0" i="0" kern="1200" dirty="0">
                           <a:solidFill>
                             <a:schemeClr val="tx1"/>
                           </a:solidFill>
@@ -30741,7 +30854,7 @@
                         </a:rPr>
                         <a:t>;</a:t>
                       </a:r>
-                      <a:endParaRPr lang="en-US" sz="1600" i="0" dirty="0">
+                      <a:endParaRPr lang="en-US" sz="1200" i="0" dirty="0">
                         <a:effectLst/>
                         <a:latin typeface="Consolas" panose="020B0609020204030204" pitchFamily="49" charset="0"/>
                         <a:cs typeface="Consolas" panose="020B0609020204030204" pitchFamily="49" charset="0"/>
@@ -30781,7 +30894,7 @@
           </p:nvPr>
         </p:nvGraphicFramePr>
         <p:xfrm>
-          <a:off x="990600" y="3820886"/>
+          <a:off x="990600" y="3511296"/>
           <a:ext cx="7391400" cy="1017070"/>
         </p:xfrm>
         <a:graphic>
@@ -30821,7 +30934,7 @@
                         </a:spcAft>
                       </a:pPr>
                       <a:r>
-                        <a:rPr lang="en-US" sz="1600" dirty="0">
+                        <a:rPr lang="en-US" sz="1200" dirty="0">
                           <a:solidFill>
                             <a:schemeClr val="bg1"/>
                           </a:solidFill>
@@ -30831,7 +30944,7 @@
                         </a:rPr>
                         <a:t>Assembly Program</a:t>
                       </a:r>
-                      <a:endParaRPr lang="en-US" sz="1600" dirty="0">
+                      <a:endParaRPr lang="en-US" sz="1200" dirty="0">
                         <a:solidFill>
                           <a:schemeClr val="bg1"/>
                         </a:solidFill>
@@ -30862,7 +30975,7 @@
                         </a:spcAft>
                       </a:pPr>
                       <a:r>
-                        <a:rPr lang="en-US" sz="1600" dirty="0">
+                        <a:rPr lang="en-US" sz="1200" dirty="0">
                           <a:solidFill>
                             <a:schemeClr val="bg1"/>
                           </a:solidFill>
@@ -30872,7 +30985,7 @@
                         </a:rPr>
                         <a:t>C Program</a:t>
                       </a:r>
-                      <a:endParaRPr lang="en-US" sz="1600" dirty="0">
+                      <a:endParaRPr lang="en-US" sz="1200" dirty="0">
                         <a:solidFill>
                           <a:schemeClr val="bg1"/>
                         </a:solidFill>
@@ -30902,7 +31015,7 @@
                     <a:lstStyle/>
                     <a:p>
                       <a:r>
-                        <a:rPr kumimoji="0" lang="pt-BR" sz="1600" b="1" i="0" kern="1200" dirty="0">
+                        <a:rPr kumimoji="0" lang="pt-BR" sz="1200" b="1" i="0" kern="1200" dirty="0">
                           <a:solidFill>
                             <a:schemeClr val="tx1"/>
                           </a:solidFill>
@@ -30914,7 +31027,7 @@
                         <a:t>CMP</a:t>
                       </a:r>
                       <a:r>
-                        <a:rPr kumimoji="0" lang="pt-BR" sz="1600" b="0" i="0" kern="1200" dirty="0">
+                        <a:rPr kumimoji="0" lang="pt-BR" sz="1200" b="0" i="0" kern="1200" dirty="0">
                           <a:solidFill>
                             <a:schemeClr val="tx1"/>
                           </a:solidFill>
@@ -30926,7 +31039,7 @@
                         <a:t>   r0, #'A’</a:t>
                       </a:r>
                       <a:r>
-                        <a:rPr kumimoji="0" lang="pt-BR" sz="1600" b="0" i="1" kern="1200" dirty="0">
+                        <a:rPr kumimoji="0" lang="pt-BR" sz="1200" b="0" i="1" kern="1200" dirty="0">
                           <a:solidFill>
                             <a:schemeClr val="tx1"/>
                           </a:solidFill>
@@ -30940,7 +31053,7 @@
                     </a:p>
                     <a:p>
                       <a:r>
-                        <a:rPr kumimoji="0" lang="pt-BR" sz="1600" b="1" i="0" kern="1200" dirty="0">
+                        <a:rPr kumimoji="0" lang="pt-BR" sz="1200" b="1" i="0" kern="1200" dirty="0">
                           <a:solidFill>
                             <a:schemeClr val="tx1"/>
                           </a:solidFill>
@@ -30949,10 +31062,12 @@
                           <a:ea typeface="+mn-ea"/>
                           <a:cs typeface="+mn-cs"/>
                         </a:rPr>
-                        <a:t>CMPNE</a:t>
-                      </a:r>
-                      <a:r>
-                        <a:rPr kumimoji="0" lang="pt-BR" sz="1600" b="0" i="0" kern="1200" dirty="0">
+                        <a:t>ITE NE</a:t>
+                      </a:r>
+                    </a:p>
+                    <a:p>
+                      <a:r>
+                        <a:rPr kumimoji="0" lang="pt-BR" sz="1200" b="1" i="0" kern="1200" dirty="0">
                           <a:solidFill>
                             <a:schemeClr val="tx1"/>
                           </a:solidFill>
@@ -30961,10 +31076,10 @@
                           <a:ea typeface="+mn-ea"/>
                           <a:cs typeface="+mn-cs"/>
                         </a:rPr>
-                        <a:t> r0, #'</a:t>
-                      </a:r>
-                      <a:r>
-                        <a:rPr kumimoji="0" lang="pt-BR" sz="1600" b="1" i="0" kern="1200" dirty="0">
+                        <a:t>CMPNE</a:t>
+                      </a:r>
+                      <a:r>
+                        <a:rPr kumimoji="0" lang="pt-BR" sz="1200" b="0" i="0" kern="1200" dirty="0">
                           <a:solidFill>
                             <a:schemeClr val="tx1"/>
                           </a:solidFill>
@@ -30973,10 +31088,10 @@
                           <a:ea typeface="+mn-ea"/>
                           <a:cs typeface="+mn-cs"/>
                         </a:rPr>
-                        <a:t>B</a:t>
-                      </a:r>
-                      <a:r>
-                        <a:rPr kumimoji="0" lang="pt-BR" sz="1600" b="0" i="0" kern="1200" dirty="0">
+                        <a:t> r0, #'</a:t>
+                      </a:r>
+                      <a:r>
+                        <a:rPr kumimoji="0" lang="pt-BR" sz="1200" b="1" i="0" kern="1200" dirty="0">
                           <a:solidFill>
                             <a:schemeClr val="tx1"/>
                           </a:solidFill>
@@ -30985,12 +31100,10 @@
                           <a:ea typeface="+mn-ea"/>
                           <a:cs typeface="+mn-cs"/>
                         </a:rPr>
-                        <a:t>'</a:t>
-                      </a:r>
-                    </a:p>
-                    <a:p>
-                      <a:r>
-                        <a:rPr kumimoji="0" lang="pt-BR" sz="1600" b="1" i="0" kern="1200" dirty="0">
+                        <a:t>B</a:t>
+                      </a:r>
+                      <a:r>
+                        <a:rPr kumimoji="0" lang="pt-BR" sz="1200" b="0" i="0" kern="1200" dirty="0">
                           <a:solidFill>
                             <a:schemeClr val="tx1"/>
                           </a:solidFill>
@@ -30999,10 +31112,24 @@
                           <a:ea typeface="+mn-ea"/>
                           <a:cs typeface="+mn-cs"/>
                         </a:rPr>
+                        <a:t>'</a:t>
+                      </a:r>
+                    </a:p>
+                    <a:p>
+                      <a:r>
+                        <a:rPr kumimoji="0" lang="pt-BR" sz="1200" b="1" i="0" kern="1200" dirty="0">
+                          <a:solidFill>
+                            <a:schemeClr val="tx1"/>
+                          </a:solidFill>
+                          <a:effectLst/>
+                          <a:latin typeface="Consolas" panose="020B0609020204030204" pitchFamily="49" charset="0"/>
+                          <a:ea typeface="+mn-ea"/>
+                          <a:cs typeface="+mn-cs"/>
+                        </a:rPr>
                         <a:t>MOVEQ</a:t>
                       </a:r>
                       <a:r>
-                        <a:rPr kumimoji="0" lang="pt-BR" sz="1600" b="0" i="0" kern="1200" dirty="0">
+                        <a:rPr kumimoji="0" lang="pt-BR" sz="1200" b="0" i="0" kern="1200" dirty="0">
                           <a:solidFill>
                             <a:schemeClr val="tx1"/>
                           </a:solidFill>
@@ -31023,7 +31150,7 @@
                     <a:lstStyle/>
                     <a:p>
                       <a:r>
-                        <a:rPr kumimoji="0" lang="pt-BR" sz="1600" b="0" i="0" kern="1200" dirty="0">
+                        <a:rPr kumimoji="0" lang="pt-BR" sz="1200" b="0" i="0" kern="1200" dirty="0">
                           <a:solidFill>
                             <a:schemeClr val="tx1"/>
                           </a:solidFill>
@@ -31032,12 +31159,12 @@
                           <a:ea typeface="+mn-ea"/>
                           <a:cs typeface="+mn-cs"/>
                         </a:rPr>
-                        <a:t>if (c == ‘A’ || c == 'B')</a:t>
-                      </a:r>
-                    </a:p>
-                    <a:p>
-                      <a:r>
-                        <a:rPr kumimoji="0" lang="en-US" sz="1600" b="0" i="0" kern="1200" dirty="0">
+                        <a:t>if (x == ‘A’ || x == 'B')</a:t>
+                      </a:r>
+                    </a:p>
+                    <a:p>
+                      <a:r>
+                        <a:rPr kumimoji="0" lang="en-US" sz="1200" b="0" i="0" kern="1200" dirty="0">
                           <a:solidFill>
                             <a:schemeClr val="tx1"/>
                           </a:solidFill>
@@ -31049,7 +31176,7 @@
                         <a:t>  </a:t>
                       </a:r>
                       <a:r>
-                        <a:rPr kumimoji="0" lang="pt-BR" sz="1600" b="0" i="0" kern="1200" dirty="0">
+                        <a:rPr kumimoji="0" lang="pt-BR" sz="1200" b="0" i="0" kern="1200" dirty="0">
                           <a:solidFill>
                             <a:schemeClr val="tx1"/>
                           </a:solidFill>
@@ -31061,7 +31188,7 @@
                         <a:t>y = 1</a:t>
                       </a:r>
                       <a:r>
-                        <a:rPr kumimoji="0" lang="en-US" sz="1600" b="0" i="0" kern="1200" dirty="0">
+                        <a:rPr kumimoji="0" lang="en-US" sz="1200" b="0" i="0" kern="1200" dirty="0">
                           <a:solidFill>
                             <a:schemeClr val="tx1"/>
                           </a:solidFill>
@@ -31072,7 +31199,7 @@
                         </a:rPr>
                         <a:t>;</a:t>
                       </a:r>
-                      <a:endParaRPr lang="en-US" sz="1600" i="0" dirty="0">
+                      <a:endParaRPr lang="en-US" sz="1200" i="0" dirty="0">
                         <a:effectLst/>
                         <a:latin typeface="Consolas" panose="020B0609020204030204" pitchFamily="49" charset="0"/>
                         <a:cs typeface="Consolas" panose="020B0609020204030204" pitchFamily="49" charset="0"/>
@@ -31112,7 +31239,7 @@
           </p:nvPr>
         </p:nvGraphicFramePr>
         <p:xfrm>
-          <a:off x="990600" y="4881499"/>
+          <a:off x="990600" y="4626864"/>
           <a:ext cx="7391400" cy="1402080"/>
         </p:xfrm>
         <a:graphic>
@@ -31152,7 +31279,7 @@
                         </a:spcAft>
                       </a:pPr>
                       <a:r>
-                        <a:rPr lang="en-US" sz="1600" dirty="0">
+                        <a:rPr lang="en-US" sz="1200" dirty="0">
                           <a:solidFill>
                             <a:schemeClr val="bg1"/>
                           </a:solidFill>
@@ -31162,7 +31289,7 @@
                         </a:rPr>
                         <a:t>Assembly Program</a:t>
                       </a:r>
-                      <a:endParaRPr lang="en-US" sz="1600" dirty="0">
+                      <a:endParaRPr lang="en-US" sz="1200" dirty="0">
                         <a:solidFill>
                           <a:schemeClr val="bg1"/>
                         </a:solidFill>
@@ -31193,7 +31320,7 @@
                         </a:spcAft>
                       </a:pPr>
                       <a:r>
-                        <a:rPr lang="en-US" sz="1600" dirty="0">
+                        <a:rPr lang="en-US" sz="1200" dirty="0">
                           <a:solidFill>
                             <a:schemeClr val="bg1"/>
                           </a:solidFill>
@@ -31203,7 +31330,7 @@
                         </a:rPr>
                         <a:t>C Program</a:t>
                       </a:r>
-                      <a:endParaRPr lang="en-US" sz="1600" dirty="0">
+                      <a:endParaRPr lang="en-US" sz="1200" dirty="0">
                         <a:solidFill>
                           <a:schemeClr val="bg1"/>
                         </a:solidFill>
@@ -31233,7 +31360,7 @@
                     <a:lstStyle/>
                     <a:p>
                       <a:r>
-                        <a:rPr kumimoji="0" lang="pt-BR" sz="1600" b="1" i="0" kern="1200" dirty="0">
+                        <a:rPr kumimoji="0" lang="pt-BR" sz="1200" b="1" i="0" kern="1200" dirty="0">
                           <a:solidFill>
                             <a:schemeClr val="tx1"/>
                           </a:solidFill>
@@ -31245,7 +31372,7 @@
                         <a:t>CMP</a:t>
                       </a:r>
                       <a:r>
-                        <a:rPr kumimoji="0" lang="pt-BR" sz="1600" b="0" i="0" kern="1200" dirty="0">
+                        <a:rPr kumimoji="0" lang="pt-BR" sz="1200" b="0" i="0" kern="1200" dirty="0">
                           <a:solidFill>
                             <a:schemeClr val="tx1"/>
                           </a:solidFill>
@@ -31257,7 +31384,7 @@
                         <a:t>   r0, #'A’</a:t>
                       </a:r>
                       <a:r>
-                        <a:rPr kumimoji="0" lang="pt-BR" sz="1600" b="0" i="1" kern="1200" dirty="0">
+                        <a:rPr kumimoji="0" lang="pt-BR" sz="1200" b="0" i="1" kern="1200" dirty="0">
                           <a:solidFill>
                             <a:schemeClr val="tx1"/>
                           </a:solidFill>
@@ -31271,7 +31398,7 @@
                     </a:p>
                     <a:p>
                       <a:r>
-                        <a:rPr kumimoji="0" lang="pt-BR" sz="1600" b="1" i="0" kern="1200" dirty="0">
+                        <a:rPr kumimoji="0" lang="pt-BR" sz="1200" b="1" i="0" kern="1200" dirty="0">
                           <a:solidFill>
                             <a:srgbClr val="FF0000"/>
                           </a:solidFill>
@@ -31283,7 +31410,7 @@
                         <a:t>CMP</a:t>
                       </a:r>
                       <a:r>
-                        <a:rPr kumimoji="0" lang="pt-BR" sz="1600" b="0" i="0" kern="1200" dirty="0">
+                        <a:rPr kumimoji="0" lang="pt-BR" sz="1200" b="0" i="0" kern="1200" dirty="0">
                           <a:solidFill>
                             <a:schemeClr val="tx1"/>
                           </a:solidFill>
@@ -31295,7 +31422,7 @@
                         <a:t>   r0, #’</a:t>
                       </a:r>
                       <a:r>
-                        <a:rPr kumimoji="0" lang="pt-BR" sz="1600" b="1" i="0" kern="1200" dirty="0">
+                        <a:rPr kumimoji="0" lang="pt-BR" sz="1200" b="1" i="0" kern="1200" dirty="0">
                           <a:solidFill>
                             <a:schemeClr val="tx1"/>
                           </a:solidFill>
@@ -31307,7 +31434,7 @@
                         <a:t>B</a:t>
                       </a:r>
                       <a:r>
-                        <a:rPr kumimoji="0" lang="pt-BR" sz="1600" b="0" i="0" kern="1200" dirty="0">
+                        <a:rPr kumimoji="0" lang="pt-BR" sz="1200" b="0" i="0" kern="1200" dirty="0">
                           <a:solidFill>
                             <a:schemeClr val="tx1"/>
                           </a:solidFill>
@@ -31319,7 +31446,7 @@
                         <a:t>’ </a:t>
                       </a:r>
                       <a:r>
-                        <a:rPr kumimoji="0" lang="pt-BR" sz="1400" b="0" i="0" kern="1200" dirty="0">
+                        <a:rPr kumimoji="0" lang="pt-BR" sz="1000" b="0" i="0" kern="1200" dirty="0">
                           <a:solidFill>
                             <a:schemeClr val="tx1"/>
                           </a:solidFill>
@@ -31330,7 +31457,7 @@
                         </a:rPr>
                         <a:t>%incorrect, since the 1st CMP sets flags that are overwritten by the 2nd CMP</a:t>
                       </a:r>
-                      <a:endParaRPr kumimoji="0" lang="pt-BR" sz="1600" b="0" i="0" kern="1200" dirty="0">
+                      <a:endParaRPr kumimoji="0" lang="pt-BR" sz="1200" b="0" i="0" kern="1200" dirty="0">
                         <a:solidFill>
                           <a:schemeClr val="tx1"/>
                         </a:solidFill>
@@ -31342,7 +31469,7 @@
                     </a:p>
                     <a:p>
                       <a:r>
-                        <a:rPr kumimoji="0" lang="pt-BR" sz="1600" b="1" i="0" kern="1200" dirty="0">
+                        <a:rPr kumimoji="0" lang="pt-BR" sz="1200" b="1" i="0" kern="1200" dirty="0">
                           <a:solidFill>
                             <a:schemeClr val="tx1"/>
                           </a:solidFill>
@@ -31351,10 +31478,24 @@
                           <a:ea typeface="+mn-ea"/>
                           <a:cs typeface="+mn-cs"/>
                         </a:rPr>
+                        <a:t>IT EQ</a:t>
+                      </a:r>
+                    </a:p>
+                    <a:p>
+                      <a:r>
+                        <a:rPr kumimoji="0" lang="pt-BR" sz="1200" b="1" i="0" kern="1200" dirty="0">
+                          <a:solidFill>
+                            <a:schemeClr val="tx1"/>
+                          </a:solidFill>
+                          <a:effectLst/>
+                          <a:latin typeface="Consolas" panose="020B0609020204030204" pitchFamily="49" charset="0"/>
+                          <a:ea typeface="+mn-ea"/>
+                          <a:cs typeface="+mn-cs"/>
+                        </a:rPr>
                         <a:t>MOVEQ</a:t>
                       </a:r>
                       <a:r>
-                        <a:rPr kumimoji="0" lang="pt-BR" sz="1600" b="0" i="0" kern="1200" dirty="0">
+                        <a:rPr kumimoji="0" lang="pt-BR" sz="1200" b="0" i="0" kern="1200" dirty="0">
                           <a:solidFill>
                             <a:schemeClr val="tx1"/>
                           </a:solidFill>
@@ -31375,7 +31516,7 @@
                     <a:lstStyle/>
                     <a:p>
                       <a:r>
-                        <a:rPr kumimoji="0" lang="pt-BR" sz="1600" b="0" i="0" kern="1200" dirty="0">
+                        <a:rPr kumimoji="0" lang="pt-BR" sz="1200" b="0" i="0" kern="1200" dirty="0">
                           <a:solidFill>
                             <a:schemeClr val="tx1"/>
                           </a:solidFill>
@@ -31384,12 +31525,12 @@
                           <a:ea typeface="+mn-ea"/>
                           <a:cs typeface="+mn-cs"/>
                         </a:rPr>
-                        <a:t>if (c == ‘A’ || c == 'B')</a:t>
-                      </a:r>
-                    </a:p>
-                    <a:p>
-                      <a:r>
-                        <a:rPr kumimoji="0" lang="en-US" sz="1600" b="0" i="0" kern="1200" dirty="0">
+                        <a:t>if (x == ‘A’ || x == 'B')</a:t>
+                      </a:r>
+                    </a:p>
+                    <a:p>
+                      <a:r>
+                        <a:rPr kumimoji="0" lang="en-US" sz="1200" b="0" i="0" kern="1200" dirty="0">
                           <a:solidFill>
                             <a:schemeClr val="tx1"/>
                           </a:solidFill>
@@ -31401,7 +31542,7 @@
                         <a:t>  </a:t>
                       </a:r>
                       <a:r>
-                        <a:rPr kumimoji="0" lang="pt-BR" sz="1600" b="0" i="0" kern="1200" dirty="0">
+                        <a:rPr kumimoji="0" lang="pt-BR" sz="1200" b="0" i="0" kern="1200" dirty="0">
                           <a:solidFill>
                             <a:schemeClr val="tx1"/>
                           </a:solidFill>
@@ -31413,7 +31554,7 @@
                         <a:t>y = 1</a:t>
                       </a:r>
                       <a:r>
-                        <a:rPr kumimoji="0" lang="en-US" sz="1600" b="0" i="0" kern="1200" dirty="0">
+                        <a:rPr kumimoji="0" lang="en-US" sz="1200" b="0" i="0" kern="1200" dirty="0">
                           <a:solidFill>
                             <a:schemeClr val="tx1"/>
                           </a:solidFill>
@@ -31424,7 +31565,7 @@
                         </a:rPr>
                         <a:t>;</a:t>
                       </a:r>
-                      <a:endParaRPr lang="en-US" sz="1600" i="0" dirty="0">
+                      <a:endParaRPr lang="en-US" sz="1200" i="0" dirty="0">
                         <a:effectLst/>
                         <a:latin typeface="Consolas" panose="020B0609020204030204" pitchFamily="49" charset="0"/>
                         <a:cs typeface="Consolas" panose="020B0609020204030204" pitchFamily="49" charset="0"/>
@@ -32310,6 +32451,10 @@
               <a:rPr lang="en-US" dirty="0"/>
               <a:t>Rewrite the assembly program to use conditional execution statements.</a:t>
             </a:r>
+            <a:r>
+              <a:rPr lang="en-US" dirty="0"/>
+              <a:t xml:space="preserve"> On Cortex-M the conditional instructions must be preceded by IT (here ITT NE).</a:t>
+            </a:r>
           </a:p>
         </p:txBody>
       </p:sp>
@@ -32616,6 +32761,20 @@
                           <a:cs typeface="+mn-cs"/>
                         </a:rPr>
                         <a:t>   r3, #0</a:t>
+                      </a:r>
+                    </a:p>
+                    <a:p>
+                      <a:r>
+                        <a:rPr kumimoji="0" lang="pt-BR" sz="1600" b="1" i="0" kern="1200" dirty="0">
+                          <a:solidFill>
+                            <a:schemeClr val="tx1"/>
+                          </a:solidFill>
+                          <a:effectLst/>
+                          <a:latin typeface="Consolas" panose="020B0609020204030204" pitchFamily="49" charset="0"/>
+                          <a:ea typeface="+mn-ea"/>
+                          <a:cs typeface="+mn-cs"/>
+                        </a:rPr>
+                        <a:t>ITT NE</a:t>
                       </a:r>
                     </a:p>
                     <a:p>
@@ -33014,7 +33173,7 @@
                           <a:latin typeface="Consolas" panose="020B0609020204030204" pitchFamily="49" charset="0"/>
                           <a:cs typeface="Consolas" panose="020B0609020204030204" pitchFamily="49" charset="0"/>
                         </a:rPr>
-                        <a:t>AND r1, r1, 0x0F</a:t>
+                        <a:t>AND r1, r1, #0x0F</a:t>
                       </a:r>
                     </a:p>
                     <a:p>
@@ -33639,6 +33798,14 @@
             <a:pPr lvl="1"/>
             <a:r>
               <a:rPr lang="pt-BR" dirty="0"/>
+              <a:t>IT GT</a:t>
+            </a:r>
+            <a:endParaRPr lang="en-US" dirty="0"/>
+          </a:p>
+          <a:p>
+            <a:pPr lvl="1"/>
+            <a:r>
+              <a:rPr lang="pt-BR" dirty="0"/>
               <a:t>ADDGT r0, r0, #100</a:t>
             </a:r>
             <a:endParaRPr lang="en-US" dirty="0"/>
@@ -33804,7 +33971,14 @@
             <a:pPr lvl="1"/>
             <a:r>
               <a:rPr lang="pt-BR" dirty="0"/>
-              <a:t>ADDGT r0, r0,100 ; Add 100 to r0 only if r1 &gt; r2 (Greater Than)</a:t>
+              <a:t>IT GT</a:t>
+            </a:r>
+          </a:p>
+          <a:p>
+            <a:pPr lvl="1"/>
+            <a:r>
+              <a:rPr lang="pt-BR" dirty="0"/>
+              <a:t>ADDGT r0, r0, #100 ; Add 100 to r0 only if r1 &gt; r2 (Greater Than)</a:t>
             </a:r>
           </a:p>
           <a:p>
@@ -33851,6 +34025,13 @@
               <a:t>, r1, r2</a:t>
             </a:r>
             <a:endParaRPr lang="pt-BR" dirty="0"/>
+          </a:p>
+          <a:p>
+            <a:pPr lvl="1"/>
+            <a:r>
+              <a:rPr lang="pt-BR" dirty="0"/>
+              <a:t>IT GE</a:t>
+            </a:r>
           </a:p>
           <a:p>
             <a:pPr lvl="1"/>
